--- a/PIXEL-V2-Presentation.pptx
+++ b/PIXEL-V2-Presentation.pptx
@@ -6492,7 +6492,7 @@
             </a:pPr>
             <a:r>
               <a:rPr dirty="0"/>
-              <a:t>Supports multiple payment flows and schemes</a:t>
+              <a:t>Supports multiple payment flows</a:t>
             </a:r>
           </a:p>
           <a:p>
@@ -6501,8 +6501,20 @@
             </a:pPr>
             <a:r>
               <a:rPr dirty="0"/>
-              <a:t>Receives payment messages from multiple sources (JMS)</a:t>
-            </a:r>
+              <a:t>Receives payment messages from multiple sources (</a:t>
+            </a:r>
+            <a:r>
+              <a:rPr lang="fr-FR" dirty="0"/>
+              <a:t>MQ/CFT/HTTP</a:t>
+            </a:r>
+            <a:r>
+              <a:rPr lang="fr-FR"/>
+              <a:t>/TCP</a:t>
+            </a:r>
+            <a:r>
+              <a:t>)</a:t>
+            </a:r>
+            <a:endParaRPr dirty="0"/>
           </a:p>
           <a:p>
             <a:pPr lvl="1">
